--- a/CST8912_011_Presentation1_Group3.pptx
+++ b/CST8912_011_Presentation1_Group3.pptx
@@ -8,6 +8,8 @@
     <p:sldId id="256" r:id="rId2"/>
     <p:sldId id="258" r:id="rId3"/>
     <p:sldId id="259" r:id="rId4"/>
+    <p:sldId id="260" r:id="rId5"/>
+    <p:sldId id="261" r:id="rId6"/>
   </p:sldIdLst>
   <p:sldSz cx="12192000" cy="6858000"/>
   <p:notesSz cx="6858000" cy="9144000"/>
@@ -106,15 +108,12 @@
       </a:defRPr>
     </a:lvl9pPr>
   </p:defaultTextStyle>
+  <p:extLst>
+    <p:ext uri="{EFAFB233-063F-42B5-8137-9DF3F51BA10A}">
+      <p15:sldGuideLst xmlns:p15="http://schemas.microsoft.com/office/powerpoint/2012/main"/>
+    </p:ext>
+  </p:extLst>
 </p:presentation>
-</file>
-
-<file path=ppt/revisionInfo.xml><?xml version="1.0" encoding="utf-8"?>
-<p1510:revInfo xmlns:a="http://schemas.openxmlformats.org/drawingml/2006/main" xmlns:r="http://schemas.openxmlformats.org/officeDocument/2006/relationships" xmlns:p1510="http://schemas.microsoft.com/office/powerpoint/2015/10/main">
-  <p1510:revLst>
-    <p1510:client id="{BBBE3D20-FE84-473E-BBA6-9D0D62224E83}" v="68" dt="2026-10-20T21:11:16.302"/>
-  </p1510:revLst>
-</p1510:revInfo>
 </file>
 
 <file path=ppt/changesInfos/changesInfo1.xml><?xml version="1.0" encoding="utf-8"?>
@@ -141,18 +140,57 @@
           </ac:spMkLst>
         </pc:spChg>
       </pc:sldChg>
+    </pc:docChg>
+  </pc:docChgLst>
+  <pc:docChgLst>
+    <pc:chgData name="Hussein Dawod" userId="713cb18b-743f-47e4-864b-1259d57e11a2" providerId="ADAL" clId="{C9023323-2620-4C8A-A186-951593A443A2}"/>
+    <pc:docChg chg="addSld modSld">
+      <pc:chgData name="Hussein Dawod" userId="713cb18b-743f-47e4-864b-1259d57e11a2" providerId="ADAL" clId="{C9023323-2620-4C8A-A186-951593A443A2}" dt="2026-10-22T01:20:30.709" v="177" actId="20577"/>
+      <pc:docMkLst>
+        <pc:docMk/>
+      </pc:docMkLst>
       <pc:sldChg chg="modSp mod">
-        <pc:chgData name="Xiaoting Zheng" userId="72237415-4a05-4ccd-b76c-724ae1aa94af" providerId="ADAL" clId="{A9AC8DD7-99C4-4C04-BD45-B5560A7C1890}" dt="2026-10-20T21:11:13.270" v="64" actId="20577"/>
+        <pc:chgData name="Hussein Dawod" userId="713cb18b-743f-47e4-864b-1259d57e11a2" providerId="ADAL" clId="{C9023323-2620-4C8A-A186-951593A443A2}" dt="2026-10-22T01:17:11.569" v="36" actId="1076"/>
         <pc:sldMkLst>
           <pc:docMk/>
-          <pc:sldMk cId="2915910398" sldId="257"/>
+          <pc:sldMk cId="1330508910" sldId="256"/>
         </pc:sldMkLst>
         <pc:spChg chg="mod">
-          <ac:chgData name="Xiaoting Zheng" userId="72237415-4a05-4ccd-b76c-724ae1aa94af" providerId="ADAL" clId="{A9AC8DD7-99C4-4C04-BD45-B5560A7C1890}" dt="2026-10-20T21:11:13.270" v="64" actId="20577"/>
+          <ac:chgData name="Hussein Dawod" userId="713cb18b-743f-47e4-864b-1259d57e11a2" providerId="ADAL" clId="{C9023323-2620-4C8A-A186-951593A443A2}" dt="2026-10-22T01:17:11.569" v="36" actId="1076"/>
           <ac:spMkLst>
             <pc:docMk/>
-            <pc:sldMk cId="2915910398" sldId="257"/>
-            <ac:spMk id="3" creationId="{AC6A748D-E5FA-4015-F9BA-E16456391EA5}"/>
+            <pc:sldMk cId="1330508910" sldId="256"/>
+            <ac:spMk id="2" creationId="{B42DEB0C-E09D-F50C-56C7-19588C7C5AE2}"/>
+          </ac:spMkLst>
+        </pc:spChg>
+      </pc:sldChg>
+      <pc:sldChg chg="modSp new mod">
+        <pc:chgData name="Hussein Dawod" userId="713cb18b-743f-47e4-864b-1259d57e11a2" providerId="ADAL" clId="{C9023323-2620-4C8A-A186-951593A443A2}" dt="2026-10-22T01:18:04.202" v="103" actId="20577"/>
+        <pc:sldMkLst>
+          <pc:docMk/>
+          <pc:sldMk cId="4056211146" sldId="260"/>
+        </pc:sldMkLst>
+        <pc:spChg chg="mod">
+          <ac:chgData name="Hussein Dawod" userId="713cb18b-743f-47e4-864b-1259d57e11a2" providerId="ADAL" clId="{C9023323-2620-4C8A-A186-951593A443A2}" dt="2026-10-22T01:18:04.202" v="103" actId="20577"/>
+          <ac:spMkLst>
+            <pc:docMk/>
+            <pc:sldMk cId="4056211146" sldId="260"/>
+            <ac:spMk id="2" creationId="{4ED10533-A634-BCF7-7EA3-42B65B504A5F}"/>
+          </ac:spMkLst>
+        </pc:spChg>
+      </pc:sldChg>
+      <pc:sldChg chg="modSp new mod">
+        <pc:chgData name="Hussein Dawod" userId="713cb18b-743f-47e4-864b-1259d57e11a2" providerId="ADAL" clId="{C9023323-2620-4C8A-A186-951593A443A2}" dt="2026-10-22T01:20:30.709" v="177" actId="20577"/>
+        <pc:sldMkLst>
+          <pc:docMk/>
+          <pc:sldMk cId="1998611066" sldId="261"/>
+        </pc:sldMkLst>
+        <pc:spChg chg="mod">
+          <ac:chgData name="Hussein Dawod" userId="713cb18b-743f-47e4-864b-1259d57e11a2" providerId="ADAL" clId="{C9023323-2620-4C8A-A186-951593A443A2}" dt="2026-10-22T01:20:30.709" v="177" actId="20577"/>
+          <ac:spMkLst>
+            <pc:docMk/>
+            <pc:sldMk cId="1998611066" sldId="261"/>
+            <ac:spMk id="2" creationId="{A6985306-8058-68F8-670A-5744BC1B8492}"/>
           </ac:spMkLst>
         </pc:spChg>
       </pc:sldChg>
@@ -6034,14 +6072,30 @@
             <p:ph type="ctrTitle"/>
           </p:nvPr>
         </p:nvSpPr>
-        <p:spPr/>
-        <p:txBody>
-          <a:bodyPr/>
-          <a:lstStyle/>
-          <a:p>
-            <a:r>
-              <a:rPr lang="en-CA"/>
-              <a:t>SPAR NL ANALYSIS	</a:t>
+        <p:spPr>
+          <a:xfrm>
+            <a:off x="857504" y="1912263"/>
+            <a:ext cx="11037045" cy="2390955"/>
+          </a:xfrm>
+        </p:spPr>
+        <p:txBody>
+          <a:bodyPr/>
+          <a:lstStyle/>
+          <a:p>
+            <a:r>
+              <a:rPr lang="en-CA" dirty="0"/>
+              <a:t>SERVERLESS COMPUTING</a:t>
+            </a:r>
+            <a:br>
+              <a:rPr lang="en-CA" dirty="0"/>
+            </a:br>
+            <a:r>
+              <a:rPr lang="en-CA" i="1" dirty="0"/>
+              <a:t>SPAR NL ANALYSIS</a:t>
+            </a:r>
+            <a:r>
+              <a:rPr lang="en-CA" dirty="0"/>
+              <a:t>	</a:t>
             </a:r>
           </a:p>
         </p:txBody>
@@ -6426,6 +6480,172 @@
     <p:extLst>
       <p:ext uri="{BB962C8B-B14F-4D97-AF65-F5344CB8AC3E}">
         <p14:creationId xmlns:p14="http://schemas.microsoft.com/office/powerpoint/2010/main" val="675814673"/>
+      </p:ext>
+    </p:extLst>
+  </p:cSld>
+  <p:clrMapOvr>
+    <a:masterClrMapping/>
+  </p:clrMapOvr>
+</p:sld>
+</file>
+
+<file path=ppt/slides/slide4.xml><?xml version="1.0" encoding="utf-8"?>
+<p:sld xmlns:a="http://schemas.openxmlformats.org/drawingml/2006/main" xmlns:r="http://schemas.openxmlformats.org/officeDocument/2006/relationships" xmlns:p="http://schemas.openxmlformats.org/presentationml/2006/main">
+  <p:cSld>
+    <p:spTree>
+      <p:nvGrpSpPr>
+        <p:cNvPr id="1" name=""/>
+        <p:cNvGrpSpPr/>
+        <p:nvPr/>
+      </p:nvGrpSpPr>
+      <p:grpSpPr>
+        <a:xfrm>
+          <a:off x="0" y="0"/>
+          <a:ext cx="0" cy="0"/>
+          <a:chOff x="0" y="0"/>
+          <a:chExt cx="0" cy="0"/>
+        </a:xfrm>
+      </p:grpSpPr>
+      <p:sp>
+        <p:nvSpPr>
+          <p:cNvPr id="2" name="Title 1">
+            <a:extLst>
+              <a:ext uri="{FF2B5EF4-FFF2-40B4-BE49-F238E27FC236}">
+                <a16:creationId xmlns:a16="http://schemas.microsoft.com/office/drawing/2014/main" id="{4ED10533-A634-BCF7-7EA3-42B65B504A5F}"/>
+              </a:ext>
+            </a:extLst>
+          </p:cNvPr>
+          <p:cNvSpPr>
+            <a:spLocks noGrp="1"/>
+          </p:cNvSpPr>
+          <p:nvPr>
+            <p:ph type="title"/>
+          </p:nvPr>
+        </p:nvSpPr>
+        <p:spPr/>
+        <p:txBody>
+          <a:bodyPr/>
+          <a:lstStyle/>
+          <a:p>
+            <a:r>
+              <a:rPr lang="en-CA" dirty="0"/>
+              <a:t>Why different workloads require different hosting choices</a:t>
+            </a:r>
+          </a:p>
+        </p:txBody>
+      </p:sp>
+      <p:sp>
+        <p:nvSpPr>
+          <p:cNvPr id="3" name="Content Placeholder 2">
+            <a:extLst>
+              <a:ext uri="{FF2B5EF4-FFF2-40B4-BE49-F238E27FC236}">
+                <a16:creationId xmlns:a16="http://schemas.microsoft.com/office/drawing/2014/main" id="{57A03B8F-3DA9-217F-85B5-491D3ECD84A5}"/>
+              </a:ext>
+            </a:extLst>
+          </p:cNvPr>
+          <p:cNvSpPr>
+            <a:spLocks noGrp="1"/>
+          </p:cNvSpPr>
+          <p:nvPr>
+            <p:ph idx="1"/>
+          </p:nvPr>
+        </p:nvSpPr>
+        <p:spPr/>
+        <p:txBody>
+          <a:bodyPr/>
+          <a:lstStyle/>
+          <a:p>
+            <a:endParaRPr lang="en-CA" dirty="0"/>
+          </a:p>
+        </p:txBody>
+      </p:sp>
+    </p:spTree>
+    <p:extLst>
+      <p:ext uri="{BB962C8B-B14F-4D97-AF65-F5344CB8AC3E}">
+        <p14:creationId xmlns:p14="http://schemas.microsoft.com/office/powerpoint/2010/main" val="4056211146"/>
+      </p:ext>
+    </p:extLst>
+  </p:cSld>
+  <p:clrMapOvr>
+    <a:masterClrMapping/>
+  </p:clrMapOvr>
+</p:sld>
+</file>
+
+<file path=ppt/slides/slide5.xml><?xml version="1.0" encoding="utf-8"?>
+<p:sld xmlns:a="http://schemas.openxmlformats.org/drawingml/2006/main" xmlns:r="http://schemas.openxmlformats.org/officeDocument/2006/relationships" xmlns:p="http://schemas.openxmlformats.org/presentationml/2006/main">
+  <p:cSld>
+    <p:spTree>
+      <p:nvGrpSpPr>
+        <p:cNvPr id="1" name=""/>
+        <p:cNvGrpSpPr/>
+        <p:nvPr/>
+      </p:nvGrpSpPr>
+      <p:grpSpPr>
+        <a:xfrm>
+          <a:off x="0" y="0"/>
+          <a:ext cx="0" cy="0"/>
+          <a:chOff x="0" y="0"/>
+          <a:chExt cx="0" cy="0"/>
+        </a:xfrm>
+      </p:grpSpPr>
+      <p:sp>
+        <p:nvSpPr>
+          <p:cNvPr id="2" name="Title 1">
+            <a:extLst>
+              <a:ext uri="{FF2B5EF4-FFF2-40B4-BE49-F238E27FC236}">
+                <a16:creationId xmlns:a16="http://schemas.microsoft.com/office/drawing/2014/main" id="{A6985306-8058-68F8-670A-5744BC1B8492}"/>
+              </a:ext>
+            </a:extLst>
+          </p:cNvPr>
+          <p:cNvSpPr>
+            <a:spLocks noGrp="1"/>
+          </p:cNvSpPr>
+          <p:nvPr>
+            <p:ph type="title"/>
+          </p:nvPr>
+        </p:nvSpPr>
+        <p:spPr/>
+        <p:txBody>
+          <a:bodyPr/>
+          <a:lstStyle/>
+          <a:p>
+            <a:r>
+              <a:rPr lang="en-CA" dirty="0"/>
+              <a:t>The trade-offs between usage base costs and response time</a:t>
+            </a:r>
+          </a:p>
+        </p:txBody>
+      </p:sp>
+      <p:sp>
+        <p:nvSpPr>
+          <p:cNvPr id="3" name="Content Placeholder 2">
+            <a:extLst>
+              <a:ext uri="{FF2B5EF4-FFF2-40B4-BE49-F238E27FC236}">
+                <a16:creationId xmlns:a16="http://schemas.microsoft.com/office/drawing/2014/main" id="{DB6F84E8-F660-EAFE-DC47-DF067DB8C19C}"/>
+              </a:ext>
+            </a:extLst>
+          </p:cNvPr>
+          <p:cNvSpPr>
+            <a:spLocks noGrp="1"/>
+          </p:cNvSpPr>
+          <p:nvPr>
+            <p:ph idx="1"/>
+          </p:nvPr>
+        </p:nvSpPr>
+        <p:spPr/>
+        <p:txBody>
+          <a:bodyPr/>
+          <a:lstStyle/>
+          <a:p>
+            <a:endParaRPr lang="en-CA"/>
+          </a:p>
+        </p:txBody>
+      </p:sp>
+    </p:spTree>
+    <p:extLst>
+      <p:ext uri="{BB962C8B-B14F-4D97-AF65-F5344CB8AC3E}">
+        <p14:creationId xmlns:p14="http://schemas.microsoft.com/office/powerpoint/2010/main" val="1998611066"/>
       </p:ext>
     </p:extLst>
   </p:cSld>
